--- a/slides-en/03-specific-situations.pptx
+++ b/slides-en/03-specific-situations.pptx
@@ -606,22 +606,22 @@
           <a:lstStyle/>
           <a:p>
             <a:r>
-              <a:t>ĐA VĂN HÓA (3 phút)</a:t>
-            </a:r>
-          </a:p>
-          <a:p>
-            <a:r>
-              <a:t>• Bốn khác biệt: cách nói, thứ bậc, thời gian, cử chỉ – kiêng kỵ.</a:t>
-            </a:r>
-          </a:p>
-          <a:p>
-            <a:r>
-              <a:t>• Ví dụ hay nhất: "Để chúng tôi xem xét" trong văn hóa Nhật thường LÀ LỜI TỪ CHỐI lịch sự.</a:t>
-            </a:r>
-          </a:p>
-          <a:p>
-            <a:r>
-              <a:t>• Hỏi lớp: bạn nào từng làm việc/thực tập với người nước ngoài, kể một khác biệt đã gặp.</a:t>
+              <a:t>ACROSS CULTURES (3 minutes)</a:t>
+            </a:r>
+          </a:p>
+          <a:p>
+            <a:r>
+              <a:t>• Four differences: how things are said, hierarchy, time, gesture and taboo.</a:t>
+            </a:r>
+          </a:p>
+          <a:p>
+            <a:r>
+              <a:t>• The best example: "We will consider it" in Japanese business culture is usually A POLITE NO.</a:t>
+            </a:r>
+          </a:p>
+          <a:p>
+            <a:r>
+              <a:t>• Ask the class: has anyone worked or interned with people from another country — tell us one difference you met.</a:t>
             </a:r>
           </a:p>
         </p:txBody>
@@ -707,48 +707,48 @@
           <a:lstStyle/>
           <a:p>
             <a:r>
-              <a:t>THÍCH ỨNG (2 phút)</a:t>
-            </a:r>
-          </a:p>
-          <a:p>
-            <a:r>
-              <a:t>• 5 nguyên tắc — nhấn nguyên tắc "KHÔNG SUY DIỄN THEO CHUẨN CỦA MÌNH".</a:t>
-            </a:r>
-          </a:p>
-          <a:p>
-            <a:r>
-              <a:t>• Mẹo thực dụng: nói chậm, rõ, và XÁC NHẬN LẠI BẰNG VĂN BẢN sau cuộc họp đa quốc gia.</a:t>
+              <a:t>ADAPTING (2 minutes)</a:t>
+            </a:r>
+          </a:p>
+          <a:p>
+            <a:r>
+              <a:t>• Five principles — press "DON'T READ OTHERS BY YOUR OWN NORMS".</a:t>
+            </a:r>
+          </a:p>
+          <a:p>
+            <a:r>
+              <a:t>• The practical trick: speak slowly and clearly, and CONFIRM IN WRITING after a multinational meeting.</a:t>
             </a:r>
           </a:p>
           <a:p/>
           <a:p>
             <a:r>
-              <a:t>NÓI ĐỦ Ý (phần đã rút khỏi slide)</a:t>
-            </a:r>
-          </a:p>
-          <a:p>
-            <a:r>
-              <a:t>• Tìm hiểu trước mỗi cuộc gặp quan trọng, đừng đợi đến lúc ngồi vào bàn.</a:t>
-            </a:r>
-          </a:p>
-          <a:p>
-            <a:r>
-              <a:t>• Quan sát rồi ứng xử tương thích — bắt chước là cách học nhanh nhất.</a:t>
-            </a:r>
-          </a:p>
-          <a:p>
-            <a:r>
-              <a:t>• Hỏi lịch sự thay vì phán xét.</a:t>
-            </a:r>
-          </a:p>
-          <a:p>
-            <a:r>
-              <a:t>• Khác ngôn ngữ: nói chậm, rõ, tránh thành ngữ; tóm tắt thỏa thuận qua email sau họp.</a:t>
-            </a:r>
-          </a:p>
-          <a:p>
-            <a:r>
-              <a:t>• Thiện chí học hỏi luôn được ghi nhận ở mọi nền văn hóa.</a:t>
+              <a:t>THE FULL VERSION (moved off the slide)</a:t>
+            </a:r>
+          </a:p>
+          <a:p>
+            <a:r>
+              <a:t>• Read up before any meeting that matters; don't wait until you are at the table.</a:t>
+            </a:r>
+          </a:p>
+          <a:p>
+            <a:r>
+              <a:t>• Watch, then match — imitation is the fastest way to learn.</a:t>
+            </a:r>
+          </a:p>
+          <a:p>
+            <a:r>
+              <a:t>• Ask politely instead of judging.</a:t>
+            </a:r>
+          </a:p>
+          <a:p>
+            <a:r>
+              <a:t>• Across languages: speak slowly and clearly, avoid idiom; summarise the agreement by email afterwards.</a:t>
+            </a:r>
+          </a:p>
+          <a:p>
+            <a:r>
+              <a:t>• Willingness to learn is recognised in every culture.</a:t>
             </a:r>
           </a:p>
         </p:txBody>
@@ -834,27 +834,27 @@
           <a:lstStyle/>
           <a:p>
             <a:r>
-              <a:t>HOẠT ĐỘNG NHÓM (15 phút)</a:t>
-            </a:r>
-          </a:p>
-          <a:p>
-            <a:r>
-              <a:t>• Hai tình huống, chia lớp làm hai nửa, mỗi nửa xử lý một tình huống rồi trình bày.</a:t>
-            </a:r>
-          </a:p>
-          <a:p>
-            <a:r>
-              <a:t>• Tình huống khách hàng: yêu cầu áp dụng đủ 4 bước LAST, nói thành lời thoại cụ thể.</a:t>
-            </a:r>
-          </a:p>
-          <a:p>
-            <a:r>
-              <a:t>• Tình huống bàn tiệc: yêu cầu nói ra CÂU TỪ CHỐI cụ thể, không nói chung chung.</a:t>
-            </a:r>
-          </a:p>
-          <a:p>
-            <a:r>
-              <a:t>• Cô chốt: nguyên tắc thì giống nhau, lời nói phải phù hợp từng ngữ cảnh.</a:t>
+              <a:t>GROUP WORK (15 minutes)</a:t>
+            </a:r>
+          </a:p>
+          <a:p>
+            <a:r>
+              <a:t>• Two situations; split the class in half, each half takes one and then presents.</a:t>
+            </a:r>
+          </a:p>
+          <a:p>
+            <a:r>
+              <a:t>• The customer case: require all four LAST steps, spoken as actual lines of dialogue.</a:t>
+            </a:r>
+          </a:p>
+          <a:p>
+            <a:r>
+              <a:t>• The dinner case: require the ACTUAL WORDS of the refusal, not a general description.</a:t>
+            </a:r>
+          </a:p>
+          <a:p>
+            <a:r>
+              <a:t>• Land it yourself: the principles are the same, the words have to fit the moment.</a:t>
             </a:r>
           </a:p>
         </p:txBody>
@@ -940,17 +940,17 @@
           <a:lstStyle/>
           <a:p>
             <a:r>
-              <a:t>TỔNG KẾT (2 phút)</a:t>
-            </a:r>
-          </a:p>
-          <a:p>
-            <a:r>
-              <a:t>• Gọi sinh viên nhắc lại 4 bước LAST.</a:t>
-            </a:r>
-          </a:p>
-          <a:p>
-            <a:r>
-              <a:t>• Giao việc: 40 câu trắc nghiệm Chương 3.</a:t>
+              <a:t>SUMMARY (2 minutes)</a:t>
+            </a:r>
+          </a:p>
+          <a:p>
+            <a:r>
+              <a:t>• Call on a student to recite the four LAST steps.</a:t>
+            </a:r>
+          </a:p>
+          <a:p>
+            <a:r>
+              <a:t>• Set the work: the 40 multiple-choice questions for Chapter 3.</a:t>
             </a:r>
           </a:p>
         </p:txBody>
@@ -1036,7 +1036,7 @@
           <a:lstStyle/>
           <a:p>
             <a:r>
-              <a:t>ÔN TẬP (1 phút) — tự làm ở nhà.</a:t>
+              <a:t>REVISION (1 minute) — at home.</a:t>
             </a:r>
           </a:p>
         </p:txBody>
@@ -1122,7 +1122,7 @@
           <a:lstStyle/>
           <a:p>
             <a:r>
-              <a:t>TÀI LIỆU (1 phút) — đọc trước phần đàm phán cho buổi sau.</a:t>
+              <a:t>READING (1 minute) — read the negotiation section before the next session.</a:t>
             </a:r>
           </a:p>
         </p:txBody>
@@ -1208,7 +1208,7 @@
           <a:lstStyle/>
           <a:p>
             <a:r>
-              <a:t>CHUYỂN MỤC (30 giây).</a:t>
+              <a:t>SECTION CHANGE (30 seconds).</a:t>
             </a:r>
           </a:p>
         </p:txBody>
@@ -1278,48 +1278,48 @@
           <a:lstStyle/>
           <a:p>
             <a:r>
-              <a:t>ĐỐI TÁC – CƠ QUAN – TRUYỀN THÔNG (3 phút)</a:t>
-            </a:r>
-          </a:p>
-          <a:p>
-            <a:r>
-              <a:t>• Đối tác: quan hệ LÂU DÀI quan trọng hơn lợi thế ngắn hạn.</a:t>
-            </a:r>
-          </a:p>
-          <a:p>
-            <a:r>
-              <a:t>• Cơ quan nhà nước: đúng thủ tục, đúng thẩm quyền, HỒ SƠ CHUẨN THỂ THỨC — nối sang Chương 5.</a:t>
-            </a:r>
-          </a:p>
-          <a:p>
-            <a:r>
-              <a:t>• Truyền thông: CHỈ NGƯỜI ĐƯỢC ỦY QUYỀN phát ngôn. Nhân viên tuyệt đối không tự trả lời báo chí.</a:t>
-            </a:r>
-          </a:p>
-          <a:p>
-            <a:r>
-              <a:t>• Khủng hoảng: phản hồi NHANH, nhận trách nhiệm đúng phần của mình.</a:t>
+              <a:t>PARTNERS – GOVERNMENT – THE PRESS (3 minutes)</a:t>
+            </a:r>
+          </a:p>
+          <a:p>
+            <a:r>
+              <a:t>• Partners: the LONG relationship matters more than the short advantage.</a:t>
+            </a:r>
+          </a:p>
+          <a:p>
+            <a:r>
+              <a:t>• Government bodies: the right procedure, the right authority, PAPERWORK IN THE CORRECT FORMAT — this leads into Chapter 5.</a:t>
+            </a:r>
+          </a:p>
+          <a:p>
+            <a:r>
+              <a:t>• The press: ONLY AN AUTHORISED PERSON speaks. Staff never answer journalists on their own.</a:t>
+            </a:r>
+          </a:p>
+          <a:p>
+            <a:r>
+              <a:t>• A crisis: respond FAST, own the part that is genuinely yours.</a:t>
             </a:r>
           </a:p>
           <a:p/>
           <a:p>
             <a:r>
-              <a:t>NÓI ĐỦ Ý (phần đã rút khỏi slide)</a:t>
-            </a:r>
-          </a:p>
-          <a:p>
-            <a:r>
-              <a:t>• Đối tác: quan hệ lâu dài quan trọng hơn lợi thế ngắn hạn — đây là nền cho Chương 4.</a:t>
-            </a:r>
-          </a:p>
-          <a:p>
-            <a:r>
-              <a:t>• Cơ quan nhà nước: hồ sơ, văn bản phải chuẩn thể thức (Chương 5); tác phong nghiêm túc, đúng hẹn; tuyệt đối không “đi tắt” trái quy định.</a:t>
-            </a:r>
-          </a:p>
-          <a:p>
-            <a:r>
-              <a:t>• Truyền thông: thông tin nhất quán, trung thực; khủng hoảng thì nhận trách nhiệm đúng phần của mình, không né tránh.</a:t>
+              <a:t>THE FULL VERSION (moved off the slide)</a:t>
+            </a:r>
+          </a:p>
+          <a:p>
+            <a:r>
+              <a:t>• Partners: the long relationship matters more than the short advantage — this is the ground for Chapter 4.</a:t>
+            </a:r>
+          </a:p>
+          <a:p>
+            <a:r>
+              <a:t>• Government bodies: files and documents in the correct format (Chapter 5); a serious manner, on time; absolutely no “short cuts” outside the rules.</a:t>
+            </a:r>
+          </a:p>
+          <a:p>
+            <a:r>
+              <a:t>• The press: consistent, truthful information; in a crisis, own the part that is genuinely yours and don't dodge.</a:t>
             </a:r>
           </a:p>
         </p:txBody>
@@ -1389,7 +1389,7 @@
           <a:lstStyle/>
           <a:p>
             <a:r>
-              <a:t>CHUYỂN MỤC (30 giây) — đây là phần sinh viên hào hứng nhất, giữ nhịp vui nhưng vẫn chuẩn mực.</a:t>
+              <a:t>SECTION CHANGE (30 seconds) — this is the part students enjoy most; keep it light but keep the standard.</a:t>
             </a:r>
           </a:p>
         </p:txBody>
@@ -1459,7 +1459,7 @@
           <a:lstStyle/>
           <a:p>
             <a:r>
-              <a:t>MỤC TIÊU (1 phút) — nhấn: chương này nhiều tình huống thực tế nhất.</a:t>
+              <a:t>OBJECTIVES (1 minute) — press the point: this chapter has more real situations in it than any other.</a:t>
             </a:r>
           </a:p>
         </p:txBody>
@@ -1545,7 +1545,7 @@
           <a:lstStyle/>
           <a:p>
             <a:r>
-              <a:t>LỘ TRÌNH (1 phút) — 4 bối cảnh: nội bộ, bên ngoài, bàn tiệc, đa văn hóa.</a:t>
+              <a:t>THE MAP (1 minute) — four settings: inside the organisation, outside it, the dinner table, across cultures.</a:t>
             </a:r>
           </a:p>
         </p:txBody>
@@ -1631,53 +1631,53 @@
           <a:lstStyle/>
           <a:p>
             <a:r>
-              <a:t>VỚI CẤP TRÊN (4 phút)</a:t>
-            </a:r>
-          </a:p>
-          <a:p>
-            <a:r>
-              <a:t>• Ba tình huống: nhận việc – báo cáo – có ý kiến khác.</a:t>
-            </a:r>
-          </a:p>
-          <a:p>
-            <a:r>
-              <a:t>• Nhấn kỹ thuật XÁC NHẬN LẠI BẰNG VĂN BẢN sau khi nhận việc — tránh "sếp bảo thế này, em hiểu thế kia".</a:t>
-            </a:r>
-          </a:p>
-          <a:p>
-            <a:r>
-              <a:t>• Nguyên tắc vàng khi báo cáo: KẾT QUẢ TRƯỚC, diễn giải sau. Sếp bận, đừng kể lể quá trình.</a:t>
-            </a:r>
-          </a:p>
-          <a:p>
-            <a:r>
-              <a:t>• BÁO TIN XẤU SỚM kèm phương án — nhấn mạnh: giấu tin xấu là lỗi nặng nhất.</a:t>
-            </a:r>
-          </a:p>
-          <a:p>
-            <a:r>
-              <a:t>• Có ý kiến khác: chọn lúc riêng tư, dựa trên DỮ LIỆU và LỢI ÍCH CHUNG, và tôn trọng quyết định cuối.</a:t>
+              <a:t>WITH YOUR SUPERIORS (4 minutes)</a:t>
+            </a:r>
+          </a:p>
+          <a:p>
+            <a:r>
+              <a:t>• Three situations: taking on a task – reporting – disagreeing.</a:t>
+            </a:r>
+          </a:p>
+          <a:p>
+            <a:r>
+              <a:t>• Press the technique of CONFIRMING IN WRITING after being given a task — it heads off "but that's not what I understood".</a:t>
+            </a:r>
+          </a:p>
+          <a:p>
+            <a:r>
+              <a:t>• The golden rule for reporting: THE RESULT FIRST, the explanation after. Your manager is busy; don't narrate the process.</a:t>
+            </a:r>
+          </a:p>
+          <a:p>
+            <a:r>
+              <a:t>• BAD NEWS EARLY, with an option attached — press it: hiding bad news is the worst mistake of all.</a:t>
+            </a:r>
+          </a:p>
+          <a:p>
+            <a:r>
+              <a:t>• Disagreeing: pick a private moment, argue from DATA and the COMMON INTEREST, and respect the final decision.</a:t>
             </a:r>
           </a:p>
           <a:p/>
           <a:p>
             <a:r>
-              <a:t>NÓI ĐỦ Ý (phần đã rút khỏi slide)</a:t>
-            </a:r>
-          </a:p>
-          <a:p>
-            <a:r>
-              <a:t>• Nhận nhiệm vụ: hỏi lại cho rõ YÊU CẦU, THỜI HẠN, NGUỒN LỰC — ba thứ này thiếu một là làm sai.</a:t>
-            </a:r>
-          </a:p>
-          <a:p>
-            <a:r>
-              <a:t>• Báo cáo: kết quả trước, diễn giải sau. Tin xấu báo SỚM và kèm phương án, đừng che giấu.</a:t>
-            </a:r>
-          </a:p>
-          <a:p>
-            <a:r>
-              <a:t>• Ý kiến khác: chọn lúc riêng tư; nói trên cơ sở dữ liệu và lợi ích chung; nói xong thì tôn trọng quyết định cuối cùng.</a:t>
+              <a:t>THE FULL VERSION (moved off the slide)</a:t>
+            </a:r>
+          </a:p>
+          <a:p>
+            <a:r>
+              <a:t>• Taking on a task: ask until you are clear on the REQUIREMENT, the DEADLINE and the RESOURCES — miss one of the three and the work comes out wrong.</a:t>
+            </a:r>
+          </a:p>
+          <a:p>
+            <a:r>
+              <a:t>• Reporting: result first, explanation after. Bad news EARLY and with an option attached; never buried.</a:t>
+            </a:r>
+          </a:p>
+          <a:p>
+            <a:r>
+              <a:t>• Disagreeing: pick a private moment; argue from data and the common interest; once you have said it, respect the final decision.</a:t>
             </a:r>
           </a:p>
         </p:txBody>
@@ -1763,53 +1763,53 @@
           <a:lstStyle/>
           <a:p>
             <a:r>
-              <a:t>VỚI CẤP DƯỚI VÀ ĐỒNG NGHIỆP (3 phút)</a:t>
-            </a:r>
-          </a:p>
-          <a:p>
-            <a:r>
-              <a:t>• Giao việc rõ 3 thứ: MỤC TIÊU – THỜI HẠN – TIÊU CHUẨN.</a:t>
-            </a:r>
-          </a:p>
-          <a:p>
-            <a:r>
-              <a:t>• Quy tắc: KHEN CÔNG KHAI, PHÊ BÌNH RIÊNG TƯ. Viết to lên bảng.</a:t>
-            </a:r>
-          </a:p>
-          <a:p>
-            <a:r>
-              <a:t>• Phê bình nhắm vào HÀNH VI, không nhắm vào CON NGƯỜI: "Báo cáo này nộp trễ 2 ngày" chứ không phải "Em vô trách nhiệm".</a:t>
-            </a:r>
-          </a:p>
-          <a:p>
-            <a:r>
-              <a:t>• Với đồng nghiệp: tranh luận về công việc, không công kích cá nhân; tránh bè phái.</a:t>
+              <a:t>WITH YOUR STAFF AND COLLEAGUES (3 minutes)</a:t>
+            </a:r>
+          </a:p>
+          <a:p>
+            <a:r>
+              <a:t>• Delegate three things clearly: THE OBJECTIVE – THE DEADLINE – THE STANDARD.</a:t>
+            </a:r>
+          </a:p>
+          <a:p>
+            <a:r>
+              <a:t>• The rule: PRAISE IN PUBLIC, CRITICISE IN PRIVATE. Write it large on the board.</a:t>
+            </a:r>
+          </a:p>
+          <a:p>
+            <a:r>
+              <a:t>• Criticism aims at the BEHAVIOUR, not the PERSON: "This report was two days late", not "You're irresponsible".</a:t>
+            </a:r>
+          </a:p>
+          <a:p>
+            <a:r>
+              <a:t>• With colleagues: argue about the work, never attack the person; keep out of factions.</a:t>
             </a:r>
           </a:p>
           <a:p/>
           <a:p>
             <a:r>
-              <a:t>NÓI ĐỦ Ý (phần đã rút khỏi slide)</a:t>
-            </a:r>
-          </a:p>
-          <a:p>
-            <a:r>
-              <a:t>• Giao việc kèm NIỀM TIN và NGUỒN LỰC; kiểm tra tiến độ đúng mức, đừng quản lý vụn vặt.</a:t>
-            </a:r>
-          </a:p>
-          <a:p>
-            <a:r>
-              <a:t>• Khen thì công khai, kịp thời, cụ thể. Phê bình thì riêng tư, kèm hướng khắc phục.</a:t>
-            </a:r>
-          </a:p>
-          <a:p>
-            <a:r>
-              <a:t>• Đồng nghiệp: tránh bè phái, tránh tán chuyện sau lưng.</a:t>
-            </a:r>
-          </a:p>
-          <a:p>
-            <a:r>
-              <a:t>• Họp: có chương trình gửi trước, phát biểu ngắn gọn, kết thúc phải có biên bản và người chịu trách nhiệm từng việc.</a:t>
+              <a:t>THE FULL VERSION (moved off the slide)</a:t>
+            </a:r>
+          </a:p>
+          <a:p>
+            <a:r>
+              <a:t>• Delegate with TRUST and RESOURCES; check progress proportionately, don't micromanage.</a:t>
+            </a:r>
+          </a:p>
+          <a:p>
+            <a:r>
+              <a:t>• Praise in public, promptly, specifically. Criticise in private, with a way to put it right.</a:t>
+            </a:r>
+          </a:p>
+          <a:p>
+            <a:r>
+              <a:t>• Colleagues: no factions, no talking behind backs.</a:t>
+            </a:r>
+          </a:p>
+          <a:p>
+            <a:r>
+              <a:t>• Meetings: an agenda sent in advance, short contributions, and minutes at the end naming who owns each action.</a:t>
             </a:r>
           </a:p>
         </p:txBody>
@@ -1895,48 +1895,48 @@
           <a:lstStyle/>
           <a:p>
             <a:r>
-              <a:t>VỚI KHÁCH HÀNG (3 phút)</a:t>
-            </a:r>
-          </a:p>
-          <a:p>
-            <a:r>
-              <a:t>• Tâm thế PHỤC VỤ, không phải xin xỏ cũng không phải ban ơn.</a:t>
-            </a:r>
-          </a:p>
-          <a:p>
-            <a:r>
-              <a:t>• Mỗi điểm tiếp xúc XÂY hoặc PHÁ niềm tin.</a:t>
-            </a:r>
-          </a:p>
-          <a:p>
-            <a:r>
-              <a:t>• Bốn điều tối kỵ — nhấn điều đầu: TRANH CÃI THẮNG THUA với khách. Thắng lý mà mất khách là thua.</a:t>
-            </a:r>
-          </a:p>
-          <a:p>
-            <a:r>
-              <a:t>CHUYỂN Ý: "Vậy khi khách nổi giận thì làm sao?"''</a:t>
+              <a:t>WITH CUSTOMERS (3 minutes)</a:t>
+            </a:r>
+          </a:p>
+          <a:p>
+            <a:r>
+              <a:t>• The stance is SERVICE — neither begging nor granting favours.</a:t>
+            </a:r>
+          </a:p>
+          <a:p>
+            <a:r>
+              <a:t>• Every point of contact either BUILDS or BREAKS trust.</a:t>
+            </a:r>
+          </a:p>
+          <a:p>
+            <a:r>
+              <a:t>• Four things never to do — press the first: ARGUING TO WIN with a customer. Win the point and lose the customer and you have lost.</a:t>
+            </a:r>
+          </a:p>
+          <a:p>
+            <a:r>
+              <a:t>BRIDGE: "So what do you do when a customer is angry?"''</a:t>
             </a:r>
           </a:p>
           <a:p/>
           <a:p>
             <a:r>
-              <a:t>NÓI ĐỦ Ý (phần đã rút khỏi slide)</a:t>
-            </a:r>
-          </a:p>
-          <a:p>
-            <a:r>
-              <a:t>• Mỗi điểm tiếp xúc — chào đón, tư vấn, giao hàng, hậu mãi — đều xây hoặc phá niềm tin.</a:t>
-            </a:r>
-          </a:p>
-          <a:p>
-            <a:r>
-              <a:t>• Nguyên tắc vàng: chào niềm nở, gọi TÊN khách khi có thể; nói sự thật về sản phẩm; giữ lời hứa về thời hạn.</a:t>
-            </a:r>
-          </a:p>
-          <a:p>
-            <a:r>
-              <a:t>• Tối kỵ: hứa quá khả năng; đổ lỗi cho đồng nghiệp hoặc cho quy trình; bỏ mặc khách sau khi bán xong.</a:t>
+              <a:t>THE FULL VERSION (moved off the slide)</a:t>
+            </a:r>
+          </a:p>
+          <a:p>
+            <a:r>
+              <a:t>• Every point of contact — the greeting, the advice, the delivery, the after-sales — builds or breaks trust.</a:t>
+            </a:r>
+          </a:p>
+          <a:p>
+            <a:r>
+              <a:t>• The golden rules: greet warmly, use the customer's NAME where you can; tell the truth about the product; keep your promises on timing.</a:t>
+            </a:r>
+          </a:p>
+          <a:p>
+            <a:r>
+              <a:t>• Never: promise beyond what you can do; blame a colleague or "the process"; abandon the customer once the sale is closed.</a:t>
             </a:r>
           </a:p>
         </p:txBody>
@@ -2022,42 +2022,42 @@
           <a:lstStyle/>
           <a:p>
             <a:r>
-              <a:t>QUY TRÌNH LAST (5 phút) — NỘI DUNG QUAN TRỌNG NHẤT CHƯƠNG</a:t>
-            </a:r>
-          </a:p>
-          <a:p>
-            <a:r>
-              <a:t>• Viết 4 chữ L-A-S-T lên bảng.</a:t>
-            </a:r>
-          </a:p>
-          <a:p>
-            <a:r>
-              <a:t>• L: nghe TRỌN VẸN, không ngắt lời, không phòng thủ. Nhấn: đừng vội giải thích khi khách đang giận.</a:t>
-            </a:r>
-          </a:p>
-          <a:p>
-            <a:r>
-              <a:t>• A: xin lỗi về TRẢI NGHIỆM chưa tốt — kể cả khi chưa rõ lỗi thuộc về ai. Đây là điểm sinh viên hay tranh luận, hãy giải thích kỹ: xin lỗi ≠ nhận lỗi.</a:t>
-            </a:r>
-          </a:p>
-          <a:p>
-            <a:r>
-              <a:t>• S: phương án CỤ THỂ, thời hạn RÕ. Vượt thẩm quyền thì chuyển đúng người, không đùn đẩy.</a:t>
-            </a:r>
-          </a:p>
-          <a:p>
-            <a:r>
-              <a:t>• T: cảm ơn và THEO DÕI ĐẾN KHI XONG.</a:t>
-            </a:r>
-          </a:p>
-          <a:p>
-            <a:r>
-              <a:t>• Số liệu chốt: khách phàn nàn được xử lý tốt thường TRUNG THÀNH HƠN khách chưa từng gặp vấn đề.</a:t>
-            </a:r>
-          </a:p>
-          <a:p>
-            <a:r>
-              <a:t>• Cho lớp thực hành ngay 1 tình huống ngắn: khách nhận hàng trễ 3 ngày.</a:t>
+              <a:t>THE LAST PROCEDURE (5 minutes) — THE MOST IMPORTANT THING IN THE CHAPTER</a:t>
+            </a:r>
+          </a:p>
+          <a:p>
+            <a:r>
+              <a:t>• Write the four letters L-A-S-T on the board.</a:t>
+            </a:r>
+          </a:p>
+          <a:p>
+            <a:r>
+              <a:t>• L: listen to the WHOLE thing, no interrupting, no defending. Press it: don't rush to explain while the customer is still angry.</a:t>
+            </a:r>
+          </a:p>
+          <a:p>
+            <a:r>
+              <a:t>• A: apologise for the EXPERIENCE — even before you know whose fault it was. Students argue about this one, so explain it carefully: apologising ≠ admitting fault.</a:t>
+            </a:r>
+          </a:p>
+          <a:p>
+            <a:r>
+              <a:t>• S: a SPECIFIC option, with a CLEAR deadline. Beyond your authority, hand it to the right person — don't pass the parcel.</a:t>
+            </a:r>
+          </a:p>
+          <a:p>
+            <a:r>
+              <a:t>• T: thank them and FOLLOW IT THROUGH TO THE END.</a:t>
+            </a:r>
+          </a:p>
+          <a:p>
+            <a:r>
+              <a:t>• The closing figure: a customer whose complaint is handled well is usually MORE LOYAL than one who never had a problem.</a:t>
+            </a:r>
+          </a:p>
+          <a:p>
+            <a:r>
+              <a:t>• Have the class practise one short case at once: an order that arrived three days late.</a:t>
             </a:r>
           </a:p>
         </p:txBody>
@@ -2231,58 +2231,58 @@
           <a:lstStyle/>
           <a:p>
             <a:r>
-              <a:t>BÀN TIỆC (4 phút) — SINH VIÊN RẤT THÍCH PHẦN NÀY</a:t>
-            </a:r>
-          </a:p>
-          <a:p>
-            <a:r>
-              <a:t>• Trước tiệc: xác nhận đúng hạn, đến đúng giờ, trang phục theo tính chất, CHỜ CHỦ TIỆC XẾP CHỖ.</a:t>
-            </a:r>
-          </a:p>
-          <a:p>
-            <a:r>
-              <a:t>• Trong bữa: chủ tiệc bắt đầu trước; dụng cụ dùng TỪ NGOÀI VÀO TRONG; không nói khi đang nhai.</a:t>
-            </a:r>
-          </a:p>
-          <a:p>
-            <a:r>
-              <a:t>• Chúc rượu: người vị thế thấp hơn NÂNG LY THẤP HƠN khi cụng. Làm mẫu ngay bằng ly nước.</a:t>
-            </a:r>
-          </a:p>
-          <a:p>
-            <a:r>
-              <a:t>• NHẤN MẠNH: tôn trọng người không dùng rượu bia, TUYỆT ĐỐI KHÔNG ÉP. Dạy sinh viên cách từ chối lịch sự: "Dạ em lái xe, cho em xin ly nước thay ạ."</a:t>
-            </a:r>
-          </a:p>
-          <a:p>
-            <a:r>
-              <a:t>• Chủ đề nên và không nên nói — nhấn: tránh chính trị, tôn giáo, thu nhập, đời tư.</a:t>
+              <a:t>AT THE TABLE (4 minutes) — STUDENTS LOVE THIS PART</a:t>
+            </a:r>
+          </a:p>
+          <a:p>
+            <a:r>
+              <a:t>• Before: confirm on time, arrive on time, dress for the occasion, WAIT FOR THE HOST TO SEAT YOU.</a:t>
+            </a:r>
+          </a:p>
+          <a:p>
+            <a:r>
+              <a:t>• During: the host starts first; cutlery is used FROM THE OUTSIDE IN; don't talk with your mouth full.</a:t>
+            </a:r>
+          </a:p>
+          <a:p>
+            <a:r>
+              <a:t>• Toasts: the more junior person HOLDS THEIR GLASS LOWER when clinking. Demonstrate it with a water glass.</a:t>
+            </a:r>
+          </a:p>
+          <a:p>
+            <a:r>
+              <a:t>• PRESS THIS: respect anyone who doesn't drink, and NEVER PUSH THEM. Teach students how to decline politely: "I'm driving, could I have water instead?"</a:t>
+            </a:r>
+          </a:p>
+          <a:p>
+            <a:r>
+              <a:t>• Topics to raise and to avoid — press: no politics, no religion, no income, no private life.</a:t>
             </a:r>
           </a:p>
           <a:p/>
           <a:p>
             <a:r>
-              <a:t>NÓI ĐỦ Ý (phần đã rút khỏi slide)</a:t>
-            </a:r>
-          </a:p>
-          <a:p>
-            <a:r>
-              <a:t>• Trước tiệc: trang phục theo tính chất tiệc; vị trí ngồi thể hiện thứ bậc nên phải chờ chủ tiệc xếp chỗ.</a:t>
-            </a:r>
-          </a:p>
-          <a:p>
-            <a:r>
-              <a:t>• Trong bữa: không nói khi đang nhai, không gõ đũa, không xoay đĩa thức ăn về phía mình liên tục.</a:t>
-            </a:r>
-          </a:p>
-          <a:p>
-            <a:r>
-              <a:t>• Chúc rượu: chúc ngắn gọn, đúng đối tượng; tôn trọng người không dùng rượu bia.</a:t>
-            </a:r>
-          </a:p>
-          <a:p>
-            <a:r>
-              <a:t>• Chuyện trò: công việc chỉ bàn khi chủ tiệc gợi mở.</a:t>
+              <a:t>THE FULL VERSION (moved off the slide)</a:t>
+            </a:r>
+          </a:p>
+          <a:p>
+            <a:r>
+              <a:t>• Before: dress for the kind of occasion; where you sit signals rank, so wait for the host to place you.</a:t>
+            </a:r>
+          </a:p>
+          <a:p>
+            <a:r>
+              <a:t>• During: don't talk while chewing, don't tap your chopsticks, don't keep turning the dishes towards yourself.</a:t>
+            </a:r>
+          </a:p>
+          <a:p>
+            <a:r>
+              <a:t>• Toasts: keep them short and pitched at the right person; respect anyone who doesn't drink.</a:t>
+            </a:r>
+          </a:p>
+          <a:p>
+            <a:r>
+              <a:t>• Conversation: business only when the host opens it.</a:t>
             </a:r>
           </a:p>
         </p:txBody>

--- a/slides-en/03-specific-situations.pptx
+++ b/slides-en/03-specific-situations.pptx
@@ -518,10 +518,18 @@
           <a:lstStyle/>
           <a:p>
             <a:r>
-              <a:rPr lang="en-US" dirty="0"/>
-              <a:t/>
-            </a:r>
-            <a:endParaRPr lang="en-US" dirty="0"/>
+              <a:t>OPENING (2 minutes)</a:t>
+            </a:r>
+          </a:p>
+          <a:p>
+            <a:r>
+              <a:t>• The way in: "The same skill, but every setting has its own rules of play."</a:t>
+            </a:r>
+          </a:p>
+          <a:p>
+            <a:r>
+              <a:t>• Ask the class: "What is different about talking to your boss and talking to a close friend?"''</a:t>
+            </a:r>
           </a:p>
         </p:txBody>
       </p:sp>
@@ -1278,48 +1286,7 @@
           <a:lstStyle/>
           <a:p>
             <a:r>
-              <a:t>PARTNERS – GOVERNMENT – THE PRESS (3 minutes)</a:t>
-            </a:r>
-          </a:p>
-          <a:p>
-            <a:r>
-              <a:t>• Partners: the LONG relationship matters more than the short advantage.</a:t>
-            </a:r>
-          </a:p>
-          <a:p>
-            <a:r>
-              <a:t>• Government bodies: the right procedure, the right authority, PAPERWORK IN THE CORRECT FORMAT — this leads into Chapter 5.</a:t>
-            </a:r>
-          </a:p>
-          <a:p>
-            <a:r>
-              <a:t>• The press: ONLY AN AUTHORISED PERSON speaks. Staff never answer journalists on their own.</a:t>
-            </a:r>
-          </a:p>
-          <a:p>
-            <a:r>
-              <a:t>• A crisis: respond FAST, own the part that is genuinely yours.</a:t>
-            </a:r>
-          </a:p>
-          <a:p/>
-          <a:p>
-            <a:r>
-              <a:t>THE FULL VERSION (moved off the slide)</a:t>
-            </a:r>
-          </a:p>
-          <a:p>
-            <a:r>
-              <a:t>• Partners: the long relationship matters more than the short advantage — this is the ground for Chapter 4.</a:t>
-            </a:r>
-          </a:p>
-          <a:p>
-            <a:r>
-              <a:t>• Government bodies: files and documents in the correct format (Chapter 5); a serious manner, on time; absolutely no “short cuts” outside the rules.</a:t>
-            </a:r>
-          </a:p>
-          <a:p>
-            <a:r>
-              <a:t>• The press: consistent, truthful information; in a crisis, own the part that is genuinely yours and don't dodge.</a:t>
+              <a:t>SECTION CHANGE (30 seconds) — flag it in advance: the most important thing in the chapter is in here (the LAST procedure).</a:t>
             </a:r>
           </a:p>
         </p:txBody>
@@ -2143,10 +2110,49 @@
           <a:lstStyle/>
           <a:p>
             <a:r>
-              <a:rPr lang="en-US" dirty="0"/>
-              <a:t/>
-            </a:r>
-            <a:endParaRPr lang="en-US" dirty="0"/>
+              <a:t>PARTNERS – GOVERNMENT – THE PRESS (3 minutes)</a:t>
+            </a:r>
+          </a:p>
+          <a:p>
+            <a:r>
+              <a:t>• Partners: the LONG relationship matters more than the short advantage.</a:t>
+            </a:r>
+          </a:p>
+          <a:p>
+            <a:r>
+              <a:t>• Government bodies: the right procedure, the right authority, PAPERWORK IN THE CORRECT FORMAT — this leads into Chapter 5.</a:t>
+            </a:r>
+          </a:p>
+          <a:p>
+            <a:r>
+              <a:t>• The press: ONLY AN AUTHORISED PERSON speaks. Staff never answer journalists on their own.</a:t>
+            </a:r>
+          </a:p>
+          <a:p>
+            <a:r>
+              <a:t>• A crisis: respond FAST, own the part that is genuinely yours.</a:t>
+            </a:r>
+          </a:p>
+          <a:p/>
+          <a:p>
+            <a:r>
+              <a:t>THE FULL VERSION (moved off the slide)</a:t>
+            </a:r>
+          </a:p>
+          <a:p>
+            <a:r>
+              <a:t>• Partners: the long relationship matters more than the short advantage — this is the ground for Chapter 4.</a:t>
+            </a:r>
+          </a:p>
+          <a:p>
+            <a:r>
+              <a:t>• Government bodies: files and documents in the correct format (Chapter 5); a serious manner, on time; absolutely no “short cuts” outside the rules.</a:t>
+            </a:r>
+          </a:p>
+          <a:p>
+            <a:r>
+              <a:t>• The press: consistent, truthful information; in a crisis, own the part that is genuinely yours and don't dodge.</a:t>
+            </a:r>
           </a:p>
         </p:txBody>
       </p:sp>
